--- a/public/fun/cards/public/명함_공무원_03_아메시스트.pptx
+++ b/public/fun/cards/public/명함_공무원_03_아메시스트.pptx
@@ -4048,7 +4048,7 @@
         <p:spPr>
           <a:xfrm>
             <a:off x="252000" y="388800"/>
-            <a:ext cx="576000" cy="324000"/>
+            <a:ext cx="576000" cy="129600"/>
           </a:xfrm>
           <a:prstGeom prst="rect">
             <a:avLst/>
@@ -4063,11 +4063,11 @@
           <a:p>
             <a:pPr algn="l">
               <a:lnSpc>
-                <a:spcPts val="2610"/>
+                <a:spcPts val="927"/>
               </a:lnSpc>
             </a:pPr>
             <a:r>
-              <a:rPr sz="1800" b="1">
+              <a:rPr sz="640" b="1" spc="120">
                 <a:solidFill>
                   <a:srgbClr val="B7D3E3"/>
                 </a:solidFill>
@@ -4081,13 +4081,42 @@
       </p:sp>
       <p:sp>
         <p:nvSpPr>
-          <p:cNvPr id="4" name="텍스트"/>
+          <p:cNvPr id="4" name="Rectangle 3"/>
+          <p:cNvSpPr/>
+          <p:nvPr/>
+        </p:nvSpPr>
+        <p:spPr>
+          <a:xfrm>
+            <a:off x="252000" y="554400"/>
+            <a:ext cx="144000" cy="14400"/>
+          </a:xfrm>
+          <a:prstGeom prst="rect">
+            <a:avLst/>
+          </a:prstGeom>
+          <a:solidFill>
+            <a:srgbClr val="B7D3E3"/>
+          </a:solidFill>
+          <a:ln>
+            <a:noFill/>
+          </a:ln>
+        </p:spPr>
+        <p:txBody>
+          <a:bodyPr rtlCol="0" anchor="ctr"/>
+          <a:lstStyle/>
+          <a:p>
+            <a:pPr algn="ctr"/>
+          </a:p>
+        </p:txBody>
+      </p:sp>
+      <p:sp>
+        <p:nvSpPr>
+          <p:cNvPr id="5" name="텍스트"/>
           <p:cNvSpPr txBox="1"/>
           <p:nvPr/>
         </p:nvSpPr>
         <p:spPr>
           <a:xfrm>
-            <a:off x="252000" y="712800"/>
+            <a:off x="252000" y="626400"/>
             <a:ext cx="1296000" cy="180000"/>
           </a:xfrm>
           <a:prstGeom prst="rect">
@@ -4103,11 +4132,11 @@
           <a:p>
             <a:pPr algn="l">
               <a:lnSpc>
-                <a:spcPts val="1015"/>
+                <a:spcPts val="1073"/>
               </a:lnSpc>
             </a:pPr>
             <a:r>
-              <a:rPr sz="700" b="1">
+              <a:rPr sz="740" b="1">
                 <a:solidFill>
                   <a:srgbClr val="FFFFFF"/>
                 </a:solidFill>
@@ -4121,14 +4150,14 @@
       </p:sp>
       <p:sp>
         <p:nvSpPr>
-          <p:cNvPr id="5" name="텍스트"/>
+          <p:cNvPr id="6" name="텍스트"/>
           <p:cNvSpPr txBox="1"/>
           <p:nvPr/>
         </p:nvSpPr>
         <p:spPr>
           <a:xfrm>
             <a:off x="1656000" y="388800"/>
-            <a:ext cx="576000" cy="324000"/>
+            <a:ext cx="576000" cy="129600"/>
           </a:xfrm>
           <a:prstGeom prst="rect">
             <a:avLst/>
@@ -4143,11 +4172,11 @@
           <a:p>
             <a:pPr algn="l">
               <a:lnSpc>
-                <a:spcPts val="2610"/>
+                <a:spcPts val="927"/>
               </a:lnSpc>
             </a:pPr>
             <a:r>
-              <a:rPr sz="1800" b="1">
+              <a:rPr sz="640" b="1" spc="120">
                 <a:solidFill>
                   <a:srgbClr val="DCD6EA"/>
                 </a:solidFill>
@@ -4161,13 +4190,42 @@
       </p:sp>
       <p:sp>
         <p:nvSpPr>
-          <p:cNvPr id="6" name="텍스트"/>
+          <p:cNvPr id="7" name="Rectangle 6"/>
+          <p:cNvSpPr/>
+          <p:nvPr/>
+        </p:nvSpPr>
+        <p:spPr>
+          <a:xfrm>
+            <a:off x="1656000" y="554400"/>
+            <a:ext cx="144000" cy="14400"/>
+          </a:xfrm>
+          <a:prstGeom prst="rect">
+            <a:avLst/>
+          </a:prstGeom>
+          <a:solidFill>
+            <a:srgbClr val="DCD6EA"/>
+          </a:solidFill>
+          <a:ln>
+            <a:noFill/>
+          </a:ln>
+        </p:spPr>
+        <p:txBody>
+          <a:bodyPr rtlCol="0" anchor="ctr"/>
+          <a:lstStyle/>
+          <a:p>
+            <a:pPr algn="ctr"/>
+          </a:p>
+        </p:txBody>
+      </p:sp>
+      <p:sp>
+        <p:nvSpPr>
+          <p:cNvPr id="8" name="텍스트"/>
           <p:cNvSpPr txBox="1"/>
           <p:nvPr/>
         </p:nvSpPr>
         <p:spPr>
           <a:xfrm>
-            <a:off x="1656000" y="712800"/>
+            <a:off x="1656000" y="626400"/>
             <a:ext cx="1296000" cy="180000"/>
           </a:xfrm>
           <a:prstGeom prst="rect">
@@ -4183,11 +4241,11 @@
           <a:p>
             <a:pPr algn="l">
               <a:lnSpc>
-                <a:spcPts val="1015"/>
+                <a:spcPts val="1073"/>
               </a:lnSpc>
             </a:pPr>
             <a:r>
-              <a:rPr sz="700" b="1">
+              <a:rPr sz="740" b="1">
                 <a:solidFill>
                   <a:srgbClr val="FFFFFF"/>
                 </a:solidFill>
@@ -4201,14 +4259,14 @@
       </p:sp>
       <p:sp>
         <p:nvSpPr>
-          <p:cNvPr id="7" name="텍스트"/>
+          <p:cNvPr id="9" name="텍스트"/>
           <p:cNvSpPr txBox="1"/>
           <p:nvPr/>
         </p:nvSpPr>
         <p:spPr>
           <a:xfrm>
             <a:off x="252000" y="928800"/>
-            <a:ext cx="576000" cy="324000"/>
+            <a:ext cx="576000" cy="129600"/>
           </a:xfrm>
           <a:prstGeom prst="rect">
             <a:avLst/>
@@ -4223,11 +4281,11 @@
           <a:p>
             <a:pPr algn="l">
               <a:lnSpc>
-                <a:spcPts val="2610"/>
+                <a:spcPts val="927"/>
               </a:lnSpc>
             </a:pPr>
             <a:r>
-              <a:rPr sz="1800" b="1">
+              <a:rPr sz="640" b="1" spc="120">
                 <a:solidFill>
                   <a:srgbClr val="DCD6EA"/>
                 </a:solidFill>
@@ -4241,13 +4299,42 @@
       </p:sp>
       <p:sp>
         <p:nvSpPr>
-          <p:cNvPr id="8" name="텍스트"/>
+          <p:cNvPr id="10" name="Rectangle 9"/>
+          <p:cNvSpPr/>
+          <p:nvPr/>
+        </p:nvSpPr>
+        <p:spPr>
+          <a:xfrm>
+            <a:off x="252000" y="1094400"/>
+            <a:ext cx="144000" cy="14400"/>
+          </a:xfrm>
+          <a:prstGeom prst="rect">
+            <a:avLst/>
+          </a:prstGeom>
+          <a:solidFill>
+            <a:srgbClr val="DCD6EA"/>
+          </a:solidFill>
+          <a:ln>
+            <a:noFill/>
+          </a:ln>
+        </p:spPr>
+        <p:txBody>
+          <a:bodyPr rtlCol="0" anchor="ctr"/>
+          <a:lstStyle/>
+          <a:p>
+            <a:pPr algn="ctr"/>
+          </a:p>
+        </p:txBody>
+      </p:sp>
+      <p:sp>
+        <p:nvSpPr>
+          <p:cNvPr id="11" name="텍스트"/>
           <p:cNvSpPr txBox="1"/>
           <p:nvPr/>
         </p:nvSpPr>
         <p:spPr>
           <a:xfrm>
-            <a:off x="252000" y="1252800"/>
+            <a:off x="252000" y="1166400"/>
             <a:ext cx="1296000" cy="180000"/>
           </a:xfrm>
           <a:prstGeom prst="rect">
@@ -4263,11 +4350,11 @@
           <a:p>
             <a:pPr algn="l">
               <a:lnSpc>
-                <a:spcPts val="1015"/>
+                <a:spcPts val="1073"/>
               </a:lnSpc>
             </a:pPr>
             <a:r>
-              <a:rPr sz="700" b="1">
+              <a:rPr sz="740" b="1">
                 <a:solidFill>
                   <a:srgbClr val="FFFFFF"/>
                 </a:solidFill>
@@ -4281,14 +4368,14 @@
       </p:sp>
       <p:sp>
         <p:nvSpPr>
-          <p:cNvPr id="9" name="텍스트"/>
+          <p:cNvPr id="12" name="텍스트"/>
           <p:cNvSpPr txBox="1"/>
           <p:nvPr/>
         </p:nvSpPr>
         <p:spPr>
           <a:xfrm>
             <a:off x="1656000" y="928800"/>
-            <a:ext cx="576000" cy="324000"/>
+            <a:ext cx="576000" cy="129600"/>
           </a:xfrm>
           <a:prstGeom prst="rect">
             <a:avLst/>
@@ -4303,11 +4390,11 @@
           <a:p>
             <a:pPr algn="l">
               <a:lnSpc>
-                <a:spcPts val="2610"/>
+                <a:spcPts val="927"/>
               </a:lnSpc>
             </a:pPr>
             <a:r>
-              <a:rPr sz="1800" b="1">
+              <a:rPr sz="640" b="1" spc="120">
                 <a:solidFill>
                   <a:srgbClr val="B7D3E3"/>
                 </a:solidFill>
@@ -4321,13 +4408,42 @@
       </p:sp>
       <p:sp>
         <p:nvSpPr>
-          <p:cNvPr id="10" name="텍스트"/>
+          <p:cNvPr id="13" name="Rectangle 12"/>
+          <p:cNvSpPr/>
+          <p:nvPr/>
+        </p:nvSpPr>
+        <p:spPr>
+          <a:xfrm>
+            <a:off x="1656000" y="1094400"/>
+            <a:ext cx="144000" cy="14400"/>
+          </a:xfrm>
+          <a:prstGeom prst="rect">
+            <a:avLst/>
+          </a:prstGeom>
+          <a:solidFill>
+            <a:srgbClr val="B7D3E3"/>
+          </a:solidFill>
+          <a:ln>
+            <a:noFill/>
+          </a:ln>
+        </p:spPr>
+        <p:txBody>
+          <a:bodyPr rtlCol="0" anchor="ctr"/>
+          <a:lstStyle/>
+          <a:p>
+            <a:pPr algn="ctr"/>
+          </a:p>
+        </p:txBody>
+      </p:sp>
+      <p:sp>
+        <p:nvSpPr>
+          <p:cNvPr id="14" name="텍스트"/>
           <p:cNvSpPr txBox="1"/>
           <p:nvPr/>
         </p:nvSpPr>
         <p:spPr>
           <a:xfrm>
-            <a:off x="1656000" y="1252800"/>
+            <a:off x="1656000" y="1166400"/>
             <a:ext cx="1296000" cy="180000"/>
           </a:xfrm>
           <a:prstGeom prst="rect">
@@ -4343,11 +4459,11 @@
           <a:p>
             <a:pPr algn="l">
               <a:lnSpc>
-                <a:spcPts val="1015"/>
+                <a:spcPts val="1073"/>
               </a:lnSpc>
             </a:pPr>
             <a:r>
-              <a:rPr sz="700" b="1">
+              <a:rPr sz="740" b="1">
                 <a:solidFill>
                   <a:srgbClr val="FFFFFF"/>
                 </a:solidFill>
@@ -4361,7 +4477,7 @@
       </p:sp>
       <p:sp>
         <p:nvSpPr>
-          <p:cNvPr id="11" name="텍스트"/>
+          <p:cNvPr id="15" name="텍스트"/>
           <p:cNvSpPr txBox="1"/>
           <p:nvPr/>
         </p:nvSpPr>
